--- a/slides/PBL-orientation.pptx
+++ b/slides/PBL-orientation.pptx
@@ -2232,7 +2232,301 @@
       </p:sp>
       <p:sp>
         <p:nvSpPr>
-          <p:cNvPr id="3" name="Text 1"/>
+          <p:cNvPr id="3" name="Shape 1"/>
+          <p:cNvSpPr/>
+          <p:nvPr/>
+        </p:nvSpPr>
+        <p:spPr>
+          <a:xfrm>
+            <a:off x="1247973" y="1481328"/>
+            <a:ext cx="539862" cy="0"/>
+          </a:xfrm>
+          <a:prstGeom prst="line">
+            <a:avLst/>
+          </a:prstGeom>
+          <a:noFill/>
+          <a:ln w="27651">
+            <a:solidFill>
+              <a:srgbClr val="E9EBDF"/>
+            </a:solidFill>
+            <a:prstDash val="solid"/>
+          </a:ln>
+        </p:spPr>
+      </p:sp>
+      <p:sp>
+        <p:nvSpPr>
+          <p:cNvPr id="4" name="Shape 2"/>
+          <p:cNvSpPr/>
+          <p:nvPr/>
+        </p:nvSpPr>
+        <p:spPr>
+          <a:xfrm>
+            <a:off x="1517904" y="1211397"/>
+            <a:ext cx="0" cy="539862"/>
+          </a:xfrm>
+          <a:prstGeom prst="line">
+            <a:avLst/>
+          </a:prstGeom>
+          <a:noFill/>
+          <a:ln w="27651">
+            <a:solidFill>
+              <a:srgbClr val="E9EBDF"/>
+            </a:solidFill>
+            <a:prstDash val="solid"/>
+          </a:ln>
+        </p:spPr>
+      </p:sp>
+      <p:sp>
+        <p:nvSpPr>
+          <p:cNvPr id="5" name="Shape 3"/>
+          <p:cNvSpPr/>
+          <p:nvPr/>
+        </p:nvSpPr>
+        <p:spPr>
+          <a:xfrm>
+            <a:off x="1327036" y="1290460"/>
+            <a:ext cx="381736" cy="381736"/>
+          </a:xfrm>
+          <a:prstGeom prst="line">
+            <a:avLst/>
+          </a:prstGeom>
+          <a:noFill/>
+          <a:ln w="27651">
+            <a:solidFill>
+              <a:srgbClr val="E9EBDF"/>
+            </a:solidFill>
+            <a:prstDash val="solid"/>
+          </a:ln>
+        </p:spPr>
+      </p:sp>
+      <p:sp>
+        <p:nvSpPr>
+          <p:cNvPr id="6" name="Shape 4"/>
+          <p:cNvSpPr/>
+          <p:nvPr/>
+        </p:nvSpPr>
+        <p:spPr>
+          <a:xfrm flipV="1">
+            <a:off x="1327036" y="1290460"/>
+            <a:ext cx="381736" cy="381736"/>
+          </a:xfrm>
+          <a:prstGeom prst="line">
+            <a:avLst/>
+          </a:prstGeom>
+          <a:noFill/>
+          <a:ln w="27651">
+            <a:solidFill>
+              <a:srgbClr val="E9EBDF"/>
+            </a:solidFill>
+            <a:prstDash val="solid"/>
+          </a:ln>
+        </p:spPr>
+      </p:sp>
+      <p:sp>
+        <p:nvSpPr>
+          <p:cNvPr id="7" name="Shape 5"/>
+          <p:cNvSpPr/>
+          <p:nvPr/>
+        </p:nvSpPr>
+        <p:spPr>
+          <a:xfrm>
+            <a:off x="1350020" y="1313444"/>
+            <a:ext cx="335768" cy="335768"/>
+          </a:xfrm>
+          <a:prstGeom prst="ellipse">
+            <a:avLst/>
+          </a:prstGeom>
+          <a:ln w="27651">
+            <a:solidFill>
+              <a:srgbClr val="E9EBDF"/>
+            </a:solidFill>
+            <a:prstDash val="solid"/>
+          </a:ln>
+        </p:spPr>
+      </p:sp>
+      <p:sp>
+        <p:nvSpPr>
+          <p:cNvPr id="8" name="Shape 6"/>
+          <p:cNvSpPr/>
+          <p:nvPr/>
+        </p:nvSpPr>
+        <p:spPr>
+          <a:xfrm>
+            <a:off x="1729898" y="1423392"/>
+            <a:ext cx="115873" cy="115873"/>
+          </a:xfrm>
+          <a:prstGeom prst="ellipse">
+            <a:avLst/>
+          </a:prstGeom>
+          <a:solidFill>
+            <a:srgbClr val="E9EBDF"/>
+          </a:solidFill>
+          <a:ln/>
+        </p:spPr>
+      </p:sp>
+      <p:sp>
+        <p:nvSpPr>
+          <p:cNvPr id="9" name="Shape 7"/>
+          <p:cNvSpPr/>
+          <p:nvPr/>
+        </p:nvSpPr>
+        <p:spPr>
+          <a:xfrm>
+            <a:off x="1650838" y="1232522"/>
+            <a:ext cx="115873" cy="115873"/>
+          </a:xfrm>
+          <a:prstGeom prst="ellipse">
+            <a:avLst/>
+          </a:prstGeom>
+          <a:solidFill>
+            <a:srgbClr val="E9EBDF"/>
+          </a:solidFill>
+          <a:ln/>
+        </p:spPr>
+      </p:sp>
+      <p:sp>
+        <p:nvSpPr>
+          <p:cNvPr id="10" name="Shape 8"/>
+          <p:cNvSpPr/>
+          <p:nvPr/>
+        </p:nvSpPr>
+        <p:spPr>
+          <a:xfrm>
+            <a:off x="1459968" y="1153461"/>
+            <a:ext cx="115873" cy="115873"/>
+          </a:xfrm>
+          <a:prstGeom prst="ellipse">
+            <a:avLst/>
+          </a:prstGeom>
+          <a:solidFill>
+            <a:srgbClr val="E9EBDF"/>
+          </a:solidFill>
+          <a:ln/>
+        </p:spPr>
+      </p:sp>
+      <p:sp>
+        <p:nvSpPr>
+          <p:cNvPr id="11" name="Shape 9"/>
+          <p:cNvSpPr/>
+          <p:nvPr/>
+        </p:nvSpPr>
+        <p:spPr>
+          <a:xfrm>
+            <a:off x="1269098" y="1232522"/>
+            <a:ext cx="115873" cy="115873"/>
+          </a:xfrm>
+          <a:prstGeom prst="ellipse">
+            <a:avLst/>
+          </a:prstGeom>
+          <a:solidFill>
+            <a:srgbClr val="E9EBDF"/>
+          </a:solidFill>
+          <a:ln/>
+        </p:spPr>
+      </p:sp>
+      <p:sp>
+        <p:nvSpPr>
+          <p:cNvPr id="12" name="Shape 10"/>
+          <p:cNvSpPr/>
+          <p:nvPr/>
+        </p:nvSpPr>
+        <p:spPr>
+          <a:xfrm>
+            <a:off x="1190037" y="1423392"/>
+            <a:ext cx="115873" cy="115873"/>
+          </a:xfrm>
+          <a:prstGeom prst="ellipse">
+            <a:avLst/>
+          </a:prstGeom>
+          <a:solidFill>
+            <a:srgbClr val="E9EBDF"/>
+          </a:solidFill>
+          <a:ln/>
+        </p:spPr>
+      </p:sp>
+      <p:sp>
+        <p:nvSpPr>
+          <p:cNvPr id="13" name="Shape 11"/>
+          <p:cNvSpPr/>
+          <p:nvPr/>
+        </p:nvSpPr>
+        <p:spPr>
+          <a:xfrm>
+            <a:off x="1269098" y="1614262"/>
+            <a:ext cx="115873" cy="115873"/>
+          </a:xfrm>
+          <a:prstGeom prst="ellipse">
+            <a:avLst/>
+          </a:prstGeom>
+          <a:solidFill>
+            <a:srgbClr val="E9EBDF"/>
+          </a:solidFill>
+          <a:ln/>
+        </p:spPr>
+      </p:sp>
+      <p:sp>
+        <p:nvSpPr>
+          <p:cNvPr id="14" name="Shape 12"/>
+          <p:cNvSpPr/>
+          <p:nvPr/>
+        </p:nvSpPr>
+        <p:spPr>
+          <a:xfrm>
+            <a:off x="1459968" y="1693322"/>
+            <a:ext cx="115873" cy="115873"/>
+          </a:xfrm>
+          <a:prstGeom prst="ellipse">
+            <a:avLst/>
+          </a:prstGeom>
+          <a:solidFill>
+            <a:srgbClr val="E9EBDF"/>
+          </a:solidFill>
+          <a:ln/>
+        </p:spPr>
+      </p:sp>
+      <p:sp>
+        <p:nvSpPr>
+          <p:cNvPr id="15" name="Shape 13"/>
+          <p:cNvSpPr/>
+          <p:nvPr/>
+        </p:nvSpPr>
+        <p:spPr>
+          <a:xfrm>
+            <a:off x="1650838" y="1614262"/>
+            <a:ext cx="115873" cy="115873"/>
+          </a:xfrm>
+          <a:prstGeom prst="ellipse">
+            <a:avLst/>
+          </a:prstGeom>
+          <a:solidFill>
+            <a:srgbClr val="E9EBDF"/>
+          </a:solidFill>
+          <a:ln/>
+        </p:spPr>
+      </p:sp>
+      <p:sp>
+        <p:nvSpPr>
+          <p:cNvPr id="16" name="Shape 14"/>
+          <p:cNvSpPr/>
+          <p:nvPr/>
+        </p:nvSpPr>
+        <p:spPr>
+          <a:xfrm>
+            <a:off x="1475110" y="1438534"/>
+            <a:ext cx="85588" cy="85588"/>
+          </a:xfrm>
+          <a:prstGeom prst="ellipse">
+            <a:avLst/>
+          </a:prstGeom>
+          <a:solidFill>
+            <a:srgbClr val="E9EBDF"/>
+          </a:solidFill>
+          <a:ln/>
+        </p:spPr>
+      </p:sp>
+      <p:sp>
+        <p:nvSpPr>
+          <p:cNvPr id="17" name="Text 15"/>
           <p:cNvSpPr/>
           <p:nvPr/>
         </p:nvSpPr>
@@ -2271,7 +2565,7 @@
       </p:sp>
       <p:sp>
         <p:nvSpPr>
-          <p:cNvPr id="4" name="Text 2"/>
+          <p:cNvPr id="18" name="Text 16"/>
           <p:cNvSpPr/>
           <p:nvPr/>
         </p:nvSpPr>
@@ -2310,7 +2604,7 @@
       </p:sp>
       <p:sp>
         <p:nvSpPr>
-          <p:cNvPr id="5" name="Shape 3"/>
+          <p:cNvPr id="19" name="Shape 17"/>
           <p:cNvSpPr/>
           <p:nvPr/>
         </p:nvSpPr>
@@ -2330,7 +2624,7 @@
       </p:sp>
       <p:sp>
         <p:nvSpPr>
-          <p:cNvPr id="6" name="Text 4"/>
+          <p:cNvPr id="20" name="Text 18"/>
           <p:cNvSpPr/>
           <p:nvPr/>
         </p:nvSpPr>
@@ -2372,7 +2666,7 @@
       </p:sp>
       <p:sp>
         <p:nvSpPr>
-          <p:cNvPr id="7" name="Text 5"/>
+          <p:cNvPr id="21" name="Text 19"/>
           <p:cNvSpPr/>
           <p:nvPr/>
         </p:nvSpPr>
@@ -6126,7 +6420,301 @@
       </p:sp>
       <p:sp>
         <p:nvSpPr>
-          <p:cNvPr id="3" name="Text 1"/>
+          <p:cNvPr id="3" name="Shape 1"/>
+          <p:cNvSpPr/>
+          <p:nvPr/>
+        </p:nvSpPr>
+        <p:spPr>
+          <a:xfrm>
+            <a:off x="1247973" y="1481328"/>
+            <a:ext cx="539862" cy="0"/>
+          </a:xfrm>
+          <a:prstGeom prst="line">
+            <a:avLst/>
+          </a:prstGeom>
+          <a:noFill/>
+          <a:ln w="27651">
+            <a:solidFill>
+              <a:srgbClr val="E9EBDF"/>
+            </a:solidFill>
+            <a:prstDash val="solid"/>
+          </a:ln>
+        </p:spPr>
+      </p:sp>
+      <p:sp>
+        <p:nvSpPr>
+          <p:cNvPr id="4" name="Shape 2"/>
+          <p:cNvSpPr/>
+          <p:nvPr/>
+        </p:nvSpPr>
+        <p:spPr>
+          <a:xfrm>
+            <a:off x="1517904" y="1211397"/>
+            <a:ext cx="0" cy="539862"/>
+          </a:xfrm>
+          <a:prstGeom prst="line">
+            <a:avLst/>
+          </a:prstGeom>
+          <a:noFill/>
+          <a:ln w="27651">
+            <a:solidFill>
+              <a:srgbClr val="E9EBDF"/>
+            </a:solidFill>
+            <a:prstDash val="solid"/>
+          </a:ln>
+        </p:spPr>
+      </p:sp>
+      <p:sp>
+        <p:nvSpPr>
+          <p:cNvPr id="5" name="Shape 3"/>
+          <p:cNvSpPr/>
+          <p:nvPr/>
+        </p:nvSpPr>
+        <p:spPr>
+          <a:xfrm>
+            <a:off x="1327036" y="1290460"/>
+            <a:ext cx="381736" cy="381736"/>
+          </a:xfrm>
+          <a:prstGeom prst="line">
+            <a:avLst/>
+          </a:prstGeom>
+          <a:noFill/>
+          <a:ln w="27651">
+            <a:solidFill>
+              <a:srgbClr val="E9EBDF"/>
+            </a:solidFill>
+            <a:prstDash val="solid"/>
+          </a:ln>
+        </p:spPr>
+      </p:sp>
+      <p:sp>
+        <p:nvSpPr>
+          <p:cNvPr id="6" name="Shape 4"/>
+          <p:cNvSpPr/>
+          <p:nvPr/>
+        </p:nvSpPr>
+        <p:spPr>
+          <a:xfrm flipV="1">
+            <a:off x="1327036" y="1290460"/>
+            <a:ext cx="381736" cy="381736"/>
+          </a:xfrm>
+          <a:prstGeom prst="line">
+            <a:avLst/>
+          </a:prstGeom>
+          <a:noFill/>
+          <a:ln w="27651">
+            <a:solidFill>
+              <a:srgbClr val="E9EBDF"/>
+            </a:solidFill>
+            <a:prstDash val="solid"/>
+          </a:ln>
+        </p:spPr>
+      </p:sp>
+      <p:sp>
+        <p:nvSpPr>
+          <p:cNvPr id="7" name="Shape 5"/>
+          <p:cNvSpPr/>
+          <p:nvPr/>
+        </p:nvSpPr>
+        <p:spPr>
+          <a:xfrm>
+            <a:off x="1350020" y="1313444"/>
+            <a:ext cx="335768" cy="335768"/>
+          </a:xfrm>
+          <a:prstGeom prst="ellipse">
+            <a:avLst/>
+          </a:prstGeom>
+          <a:ln w="27651">
+            <a:solidFill>
+              <a:srgbClr val="E9EBDF"/>
+            </a:solidFill>
+            <a:prstDash val="solid"/>
+          </a:ln>
+        </p:spPr>
+      </p:sp>
+      <p:sp>
+        <p:nvSpPr>
+          <p:cNvPr id="8" name="Shape 6"/>
+          <p:cNvSpPr/>
+          <p:nvPr/>
+        </p:nvSpPr>
+        <p:spPr>
+          <a:xfrm>
+            <a:off x="1729898" y="1423392"/>
+            <a:ext cx="115873" cy="115873"/>
+          </a:xfrm>
+          <a:prstGeom prst="ellipse">
+            <a:avLst/>
+          </a:prstGeom>
+          <a:solidFill>
+            <a:srgbClr val="E9EBDF"/>
+          </a:solidFill>
+          <a:ln/>
+        </p:spPr>
+      </p:sp>
+      <p:sp>
+        <p:nvSpPr>
+          <p:cNvPr id="9" name="Shape 7"/>
+          <p:cNvSpPr/>
+          <p:nvPr/>
+        </p:nvSpPr>
+        <p:spPr>
+          <a:xfrm>
+            <a:off x="1650838" y="1232522"/>
+            <a:ext cx="115873" cy="115873"/>
+          </a:xfrm>
+          <a:prstGeom prst="ellipse">
+            <a:avLst/>
+          </a:prstGeom>
+          <a:solidFill>
+            <a:srgbClr val="E9EBDF"/>
+          </a:solidFill>
+          <a:ln/>
+        </p:spPr>
+      </p:sp>
+      <p:sp>
+        <p:nvSpPr>
+          <p:cNvPr id="10" name="Shape 8"/>
+          <p:cNvSpPr/>
+          <p:nvPr/>
+        </p:nvSpPr>
+        <p:spPr>
+          <a:xfrm>
+            <a:off x="1459968" y="1153461"/>
+            <a:ext cx="115873" cy="115873"/>
+          </a:xfrm>
+          <a:prstGeom prst="ellipse">
+            <a:avLst/>
+          </a:prstGeom>
+          <a:solidFill>
+            <a:srgbClr val="E9EBDF"/>
+          </a:solidFill>
+          <a:ln/>
+        </p:spPr>
+      </p:sp>
+      <p:sp>
+        <p:nvSpPr>
+          <p:cNvPr id="11" name="Shape 9"/>
+          <p:cNvSpPr/>
+          <p:nvPr/>
+        </p:nvSpPr>
+        <p:spPr>
+          <a:xfrm>
+            <a:off x="1269098" y="1232522"/>
+            <a:ext cx="115873" cy="115873"/>
+          </a:xfrm>
+          <a:prstGeom prst="ellipse">
+            <a:avLst/>
+          </a:prstGeom>
+          <a:solidFill>
+            <a:srgbClr val="E9EBDF"/>
+          </a:solidFill>
+          <a:ln/>
+        </p:spPr>
+      </p:sp>
+      <p:sp>
+        <p:nvSpPr>
+          <p:cNvPr id="12" name="Shape 10"/>
+          <p:cNvSpPr/>
+          <p:nvPr/>
+        </p:nvSpPr>
+        <p:spPr>
+          <a:xfrm>
+            <a:off x="1190037" y="1423392"/>
+            <a:ext cx="115873" cy="115873"/>
+          </a:xfrm>
+          <a:prstGeom prst="ellipse">
+            <a:avLst/>
+          </a:prstGeom>
+          <a:solidFill>
+            <a:srgbClr val="E9EBDF"/>
+          </a:solidFill>
+          <a:ln/>
+        </p:spPr>
+      </p:sp>
+      <p:sp>
+        <p:nvSpPr>
+          <p:cNvPr id="13" name="Shape 11"/>
+          <p:cNvSpPr/>
+          <p:nvPr/>
+        </p:nvSpPr>
+        <p:spPr>
+          <a:xfrm>
+            <a:off x="1269098" y="1614262"/>
+            <a:ext cx="115873" cy="115873"/>
+          </a:xfrm>
+          <a:prstGeom prst="ellipse">
+            <a:avLst/>
+          </a:prstGeom>
+          <a:solidFill>
+            <a:srgbClr val="E9EBDF"/>
+          </a:solidFill>
+          <a:ln/>
+        </p:spPr>
+      </p:sp>
+      <p:sp>
+        <p:nvSpPr>
+          <p:cNvPr id="14" name="Shape 12"/>
+          <p:cNvSpPr/>
+          <p:nvPr/>
+        </p:nvSpPr>
+        <p:spPr>
+          <a:xfrm>
+            <a:off x="1459968" y="1693322"/>
+            <a:ext cx="115873" cy="115873"/>
+          </a:xfrm>
+          <a:prstGeom prst="ellipse">
+            <a:avLst/>
+          </a:prstGeom>
+          <a:solidFill>
+            <a:srgbClr val="E9EBDF"/>
+          </a:solidFill>
+          <a:ln/>
+        </p:spPr>
+      </p:sp>
+      <p:sp>
+        <p:nvSpPr>
+          <p:cNvPr id="15" name="Shape 13"/>
+          <p:cNvSpPr/>
+          <p:nvPr/>
+        </p:nvSpPr>
+        <p:spPr>
+          <a:xfrm>
+            <a:off x="1650838" y="1614262"/>
+            <a:ext cx="115873" cy="115873"/>
+          </a:xfrm>
+          <a:prstGeom prst="ellipse">
+            <a:avLst/>
+          </a:prstGeom>
+          <a:solidFill>
+            <a:srgbClr val="E9EBDF"/>
+          </a:solidFill>
+          <a:ln/>
+        </p:spPr>
+      </p:sp>
+      <p:sp>
+        <p:nvSpPr>
+          <p:cNvPr id="16" name="Shape 14"/>
+          <p:cNvSpPr/>
+          <p:nvPr/>
+        </p:nvSpPr>
+        <p:spPr>
+          <a:xfrm>
+            <a:off x="1475110" y="1438534"/>
+            <a:ext cx="85588" cy="85588"/>
+          </a:xfrm>
+          <a:prstGeom prst="ellipse">
+            <a:avLst/>
+          </a:prstGeom>
+          <a:solidFill>
+            <a:srgbClr val="E9EBDF"/>
+          </a:solidFill>
+          <a:ln/>
+        </p:spPr>
+      </p:sp>
+      <p:sp>
+        <p:nvSpPr>
+          <p:cNvPr id="17" name="Text 15"/>
           <p:cNvSpPr/>
           <p:nvPr/>
         </p:nvSpPr>
@@ -6165,7 +6753,7 @@
       </p:sp>
       <p:sp>
         <p:nvSpPr>
-          <p:cNvPr id="4" name="Text 2"/>
+          <p:cNvPr id="18" name="Text 16"/>
           <p:cNvSpPr/>
           <p:nvPr/>
         </p:nvSpPr>
@@ -6204,7 +6792,7 @@
       </p:sp>
       <p:sp>
         <p:nvSpPr>
-          <p:cNvPr id="5" name="Shape 3"/>
+          <p:cNvPr id="19" name="Shape 17"/>
           <p:cNvSpPr/>
           <p:nvPr/>
         </p:nvSpPr>
@@ -6224,7 +6812,7 @@
       </p:sp>
       <p:sp>
         <p:nvSpPr>
-          <p:cNvPr id="6" name="Text 4"/>
+          <p:cNvPr id="20" name="Text 18"/>
           <p:cNvSpPr/>
           <p:nvPr/>
         </p:nvSpPr>
@@ -6266,7 +6854,7 @@
       </p:sp>
       <p:sp>
         <p:nvSpPr>
-          <p:cNvPr id="7" name="Text 5"/>
+          <p:cNvPr id="21" name="Text 19"/>
           <p:cNvSpPr/>
           <p:nvPr/>
         </p:nvSpPr>
